--- a/tmt.pptx
+++ b/tmt.pptx
@@ -6,6 +6,8 @@
   </p:sldMasterIdLst>
   <p:sldIdLst>
     <p:sldId id="256" r:id="rId2"/>
+    <p:sldId id="257" r:id="rId3"/>
+    <p:sldId id="258" r:id="rId4"/>
   </p:sldIdLst>
   <p:sldSz cx="12192000" cy="6858000"/>
   <p:notesSz cx="6858000" cy="9144000"/>
@@ -104,6 +106,11 @@
       </a:defRPr>
     </a:lvl9pPr>
   </p:defaultTextStyle>
+  <p:extLst>
+    <p:ext uri="{EFAFB233-063F-42B5-8137-9DF3F51BA10A}">
+      <p15:sldGuideLst xmlns:p15="http://schemas.microsoft.com/office/powerpoint/2012/main"/>
+    </p:ext>
+  </p:extLst>
 </p:presentation>
 </file>
 
@@ -254,7 +261,7 @@
           <a:p>
             <a:fld id="{23911607-1ED3-4923-8ABB-7B7D7C3C6085}" type="datetimeFigureOut">
               <a:rPr lang="en-US" smtClean="0"/>
-              <a:t>7/3/2025</a:t>
+              <a:t>7/4/2025</a:t>
             </a:fld>
             <a:endParaRPr lang="en-US"/>
           </a:p>
@@ -452,7 +459,7 @@
           <a:p>
             <a:fld id="{23911607-1ED3-4923-8ABB-7B7D7C3C6085}" type="datetimeFigureOut">
               <a:rPr lang="en-US" smtClean="0"/>
-              <a:t>7/3/2025</a:t>
+              <a:t>7/4/2025</a:t>
             </a:fld>
             <a:endParaRPr lang="en-US"/>
           </a:p>
@@ -660,7 +667,7 @@
           <a:p>
             <a:fld id="{23911607-1ED3-4923-8ABB-7B7D7C3C6085}" type="datetimeFigureOut">
               <a:rPr lang="en-US" smtClean="0"/>
-              <a:t>7/3/2025</a:t>
+              <a:t>7/4/2025</a:t>
             </a:fld>
             <a:endParaRPr lang="en-US"/>
           </a:p>
@@ -858,7 +865,7 @@
           <a:p>
             <a:fld id="{23911607-1ED3-4923-8ABB-7B7D7C3C6085}" type="datetimeFigureOut">
               <a:rPr lang="en-US" smtClean="0"/>
-              <a:t>7/3/2025</a:t>
+              <a:t>7/4/2025</a:t>
             </a:fld>
             <a:endParaRPr lang="en-US"/>
           </a:p>
@@ -1133,7 +1140,7 @@
           <a:p>
             <a:fld id="{23911607-1ED3-4923-8ABB-7B7D7C3C6085}" type="datetimeFigureOut">
               <a:rPr lang="en-US" smtClean="0"/>
-              <a:t>7/3/2025</a:t>
+              <a:t>7/4/2025</a:t>
             </a:fld>
             <a:endParaRPr lang="en-US"/>
           </a:p>
@@ -1398,7 +1405,7 @@
           <a:p>
             <a:fld id="{23911607-1ED3-4923-8ABB-7B7D7C3C6085}" type="datetimeFigureOut">
               <a:rPr lang="en-US" smtClean="0"/>
-              <a:t>7/3/2025</a:t>
+              <a:t>7/4/2025</a:t>
             </a:fld>
             <a:endParaRPr lang="en-US"/>
           </a:p>
@@ -1810,7 +1817,7 @@
           <a:p>
             <a:fld id="{23911607-1ED3-4923-8ABB-7B7D7C3C6085}" type="datetimeFigureOut">
               <a:rPr lang="en-US" smtClean="0"/>
-              <a:t>7/3/2025</a:t>
+              <a:t>7/4/2025</a:t>
             </a:fld>
             <a:endParaRPr lang="en-US"/>
           </a:p>
@@ -1951,7 +1958,7 @@
           <a:p>
             <a:fld id="{23911607-1ED3-4923-8ABB-7B7D7C3C6085}" type="datetimeFigureOut">
               <a:rPr lang="en-US" smtClean="0"/>
-              <a:t>7/3/2025</a:t>
+              <a:t>7/4/2025</a:t>
             </a:fld>
             <a:endParaRPr lang="en-US"/>
           </a:p>
@@ -2064,7 +2071,7 @@
           <a:p>
             <a:fld id="{23911607-1ED3-4923-8ABB-7B7D7C3C6085}" type="datetimeFigureOut">
               <a:rPr lang="en-US" smtClean="0"/>
-              <a:t>7/3/2025</a:t>
+              <a:t>7/4/2025</a:t>
             </a:fld>
             <a:endParaRPr lang="en-US"/>
           </a:p>
@@ -2375,7 +2382,7 @@
           <a:p>
             <a:fld id="{23911607-1ED3-4923-8ABB-7B7D7C3C6085}" type="datetimeFigureOut">
               <a:rPr lang="en-US" smtClean="0"/>
-              <a:t>7/3/2025</a:t>
+              <a:t>7/4/2025</a:t>
             </a:fld>
             <a:endParaRPr lang="en-US"/>
           </a:p>
@@ -2663,7 +2670,7 @@
           <a:p>
             <a:fld id="{23911607-1ED3-4923-8ABB-7B7D7C3C6085}" type="datetimeFigureOut">
               <a:rPr lang="en-US" smtClean="0"/>
-              <a:t>7/3/2025</a:t>
+              <a:t>7/4/2025</a:t>
             </a:fld>
             <a:endParaRPr lang="en-US"/>
           </a:p>
@@ -2904,7 +2911,7 @@
           <a:p>
             <a:fld id="{23911607-1ED3-4923-8ABB-7B7D7C3C6085}" type="datetimeFigureOut">
               <a:rPr lang="en-US" smtClean="0"/>
-              <a:t>7/3/2025</a:t>
+              <a:t>7/4/2025</a:t>
             </a:fld>
             <a:endParaRPr lang="en-US"/>
           </a:p>
@@ -3484,6 +3491,311 @@
 </p:sld>
 </file>
 
+<file path=ppt/slides/slide2.xml><?xml version="1.0" encoding="utf-8"?>
+<p:sld xmlns:a="http://schemas.openxmlformats.org/drawingml/2006/main" xmlns:r="http://schemas.openxmlformats.org/officeDocument/2006/relationships" xmlns:p="http://schemas.openxmlformats.org/presentationml/2006/main">
+  <p:cSld>
+    <p:spTree>
+      <p:nvGrpSpPr>
+        <p:cNvPr id="1" name=""/>
+        <p:cNvGrpSpPr/>
+        <p:nvPr/>
+      </p:nvGrpSpPr>
+      <p:grpSpPr>
+        <a:xfrm>
+          <a:off x="0" y="0"/>
+          <a:ext cx="0" cy="0"/>
+          <a:chOff x="0" y="0"/>
+          <a:chExt cx="0" cy="0"/>
+        </a:xfrm>
+      </p:grpSpPr>
+      <p:sp>
+        <p:nvSpPr>
+          <p:cNvPr id="2" name="Title 1">
+            <a:extLst>
+              <a:ext uri="{FF2B5EF4-FFF2-40B4-BE49-F238E27FC236}">
+                <a16:creationId xmlns:a16="http://schemas.microsoft.com/office/drawing/2014/main" id="{112B77B7-8881-BDE3-6E0C-1711D0EFF5D3}"/>
+              </a:ext>
+            </a:extLst>
+          </p:cNvPr>
+          <p:cNvSpPr>
+            <a:spLocks noGrp="1"/>
+          </p:cNvSpPr>
+          <p:nvPr>
+            <p:ph type="title"/>
+          </p:nvPr>
+        </p:nvSpPr>
+        <p:spPr/>
+        <p:txBody>
+          <a:bodyPr/>
+          <a:lstStyle/>
+          <a:p>
+            <a:r>
+              <a:rPr lang="de-AT" dirty="0"/>
+              <a:t>Possible </a:t>
+            </a:r>
+            <a:r>
+              <a:rPr lang="de-AT" dirty="0" err="1"/>
+              <a:t>workarounds</a:t>
+            </a:r>
+            <a:endParaRPr lang="en-US" dirty="0"/>
+          </a:p>
+        </p:txBody>
+      </p:sp>
+      <p:sp>
+        <p:nvSpPr>
+          <p:cNvPr id="3" name="Content Placeholder 2">
+            <a:extLst>
+              <a:ext uri="{FF2B5EF4-FFF2-40B4-BE49-F238E27FC236}">
+                <a16:creationId xmlns:a16="http://schemas.microsoft.com/office/drawing/2014/main" id="{FC7C97C9-4AC2-3E47-4559-3424354982E4}"/>
+              </a:ext>
+            </a:extLst>
+          </p:cNvPr>
+          <p:cNvSpPr>
+            <a:spLocks noGrp="1"/>
+          </p:cNvSpPr>
+          <p:nvPr>
+            <p:ph idx="1"/>
+          </p:nvPr>
+        </p:nvSpPr>
+        <p:spPr/>
+        <p:txBody>
+          <a:bodyPr/>
+          <a:lstStyle/>
+          <a:p>
+            <a:r>
+              <a:rPr lang="de-AT" dirty="0"/>
+              <a:t>Use </a:t>
+            </a:r>
+            <a:r>
+              <a:rPr lang="de-AT" dirty="0" err="1"/>
+              <a:t>precursors</a:t>
+            </a:r>
+            <a:r>
+              <a:rPr lang="de-AT" dirty="0"/>
+              <a:t> </a:t>
+            </a:r>
+            <a:r>
+              <a:rPr lang="de-AT" dirty="0" err="1"/>
+              <a:t>with</a:t>
+            </a:r>
+            <a:r>
+              <a:rPr lang="de-AT" dirty="0"/>
+              <a:t> </a:t>
+            </a:r>
+            <a:r>
+              <a:rPr lang="de-AT" dirty="0" err="1"/>
+              <a:t>highest</a:t>
+            </a:r>
+            <a:r>
+              <a:rPr lang="de-AT" dirty="0"/>
+              <a:t> </a:t>
+            </a:r>
+            <a:r>
+              <a:rPr lang="de-AT" dirty="0" err="1"/>
+              <a:t>intensity</a:t>
+            </a:r>
+            <a:endParaRPr lang="de-AT" dirty="0"/>
+          </a:p>
+          <a:p>
+            <a:r>
+              <a:rPr lang="de-AT" dirty="0"/>
+              <a:t>Use </a:t>
+            </a:r>
+            <a:r>
+              <a:rPr lang="de-AT" dirty="0" err="1"/>
+              <a:t>precursor</a:t>
+            </a:r>
+            <a:r>
+              <a:rPr lang="de-AT" dirty="0"/>
+              <a:t> </a:t>
+            </a:r>
+            <a:r>
+              <a:rPr lang="de-AT" dirty="0" err="1"/>
+              <a:t>with</a:t>
+            </a:r>
+            <a:r>
+              <a:rPr lang="de-AT" dirty="0"/>
+              <a:t> </a:t>
+            </a:r>
+            <a:r>
+              <a:rPr lang="de-AT" dirty="0" err="1"/>
+              <a:t>lowest</a:t>
+            </a:r>
+            <a:r>
+              <a:rPr lang="de-AT" dirty="0"/>
+              <a:t> m/z </a:t>
+            </a:r>
+            <a:r>
+              <a:rPr lang="de-AT" dirty="0" err="1"/>
+              <a:t>deviation</a:t>
+            </a:r>
+            <a:r>
+              <a:rPr lang="de-AT" dirty="0"/>
+              <a:t> (</a:t>
+            </a:r>
+            <a:r>
+              <a:rPr lang="de-AT" dirty="0" err="1"/>
+              <a:t>probably</a:t>
+            </a:r>
+            <a:r>
+              <a:rPr lang="de-AT" dirty="0"/>
+              <a:t> not a </a:t>
+            </a:r>
+            <a:r>
+              <a:rPr lang="de-AT" dirty="0" err="1"/>
+              <a:t>good</a:t>
+            </a:r>
+            <a:r>
+              <a:rPr lang="de-AT" dirty="0"/>
+              <a:t> </a:t>
+            </a:r>
+            <a:r>
+              <a:rPr lang="de-AT" dirty="0" err="1"/>
+              <a:t>solution</a:t>
+            </a:r>
+            <a:r>
+              <a:rPr lang="de-AT" dirty="0"/>
+              <a:t>)</a:t>
+            </a:r>
+          </a:p>
+          <a:p>
+            <a:r>
+              <a:rPr lang="de-AT" dirty="0"/>
+              <a:t>Do not </a:t>
+            </a:r>
+            <a:r>
+              <a:rPr lang="de-AT" dirty="0" err="1"/>
+              <a:t>use</a:t>
+            </a:r>
+            <a:r>
+              <a:rPr lang="de-AT" dirty="0"/>
+              <a:t> </a:t>
+            </a:r>
+            <a:r>
+              <a:rPr lang="de-AT" dirty="0" err="1"/>
+              <a:t>the</a:t>
+            </a:r>
+            <a:r>
+              <a:rPr lang="de-AT" dirty="0"/>
+              <a:t> </a:t>
+            </a:r>
+            <a:r>
+              <a:rPr lang="de-AT" dirty="0" err="1"/>
+              <a:t>identification</a:t>
+            </a:r>
+            <a:endParaRPr lang="en-US" dirty="0"/>
+          </a:p>
+        </p:txBody>
+      </p:sp>
+    </p:spTree>
+    <p:extLst>
+      <p:ext uri="{BB962C8B-B14F-4D97-AF65-F5344CB8AC3E}">
+        <p14:creationId xmlns:p14="http://schemas.microsoft.com/office/powerpoint/2010/main" val="689094321"/>
+      </p:ext>
+    </p:extLst>
+  </p:cSld>
+  <p:clrMapOvr>
+    <a:masterClrMapping/>
+  </p:clrMapOvr>
+</p:sld>
+</file>
+
+<file path=ppt/slides/slide3.xml><?xml version="1.0" encoding="utf-8"?>
+<p:sld xmlns:a="http://schemas.openxmlformats.org/drawingml/2006/main" xmlns:r="http://schemas.openxmlformats.org/officeDocument/2006/relationships" xmlns:p="http://schemas.openxmlformats.org/presentationml/2006/main">
+  <p:cSld>
+    <p:spTree>
+      <p:nvGrpSpPr>
+        <p:cNvPr id="1" name=""/>
+        <p:cNvGrpSpPr/>
+        <p:nvPr/>
+      </p:nvGrpSpPr>
+      <p:grpSpPr>
+        <a:xfrm>
+          <a:off x="0" y="0"/>
+          <a:ext cx="0" cy="0"/>
+          <a:chOff x="0" y="0"/>
+          <a:chExt cx="0" cy="0"/>
+        </a:xfrm>
+      </p:grpSpPr>
+      <p:pic>
+        <p:nvPicPr>
+          <p:cNvPr id="5" name="Graphic 4">
+            <a:extLst>
+              <a:ext uri="{FF2B5EF4-FFF2-40B4-BE49-F238E27FC236}">
+                <a16:creationId xmlns:a16="http://schemas.microsoft.com/office/drawing/2014/main" id="{D6CFC008-AFB8-2325-DDC0-D9FA5AAA2448}"/>
+              </a:ext>
+            </a:extLst>
+          </p:cNvPr>
+          <p:cNvPicPr>
+            <a:picLocks noChangeAspect="1"/>
+          </p:cNvPicPr>
+          <p:nvPr/>
+        </p:nvPicPr>
+        <p:blipFill>
+          <a:blip r:embed="rId2">
+            <a:extLst>
+              <a:ext uri="{96DAC541-7B7A-43D3-8B79-37D633B846F1}">
+                <asvg:svgBlip xmlns:asvg="http://schemas.microsoft.com/office/drawing/2016/SVG/main" r:embed="rId3"/>
+              </a:ext>
+            </a:extLst>
+          </a:blip>
+          <a:stretch>
+            <a:fillRect/>
+          </a:stretch>
+        </p:blipFill>
+        <p:spPr>
+          <a:xfrm>
+            <a:off x="0" y="6856"/>
+            <a:ext cx="9124950" cy="6851144"/>
+          </a:xfrm>
+          <a:prstGeom prst="rect">
+            <a:avLst/>
+          </a:prstGeom>
+        </p:spPr>
+      </p:pic>
+      <p:pic>
+        <p:nvPicPr>
+          <p:cNvPr id="7" name="Picture 6">
+            <a:extLst>
+              <a:ext uri="{FF2B5EF4-FFF2-40B4-BE49-F238E27FC236}">
+                <a16:creationId xmlns:a16="http://schemas.microsoft.com/office/drawing/2014/main" id="{2C57967A-9299-BF96-650E-6CFE2074876E}"/>
+              </a:ext>
+            </a:extLst>
+          </p:cNvPr>
+          <p:cNvPicPr>
+            <a:picLocks noChangeAspect="1"/>
+          </p:cNvPicPr>
+          <p:nvPr/>
+        </p:nvPicPr>
+        <p:blipFill>
+          <a:blip r:embed="rId4"/>
+          <a:stretch>
+            <a:fillRect/>
+          </a:stretch>
+        </p:blipFill>
+        <p:spPr>
+          <a:xfrm>
+            <a:off x="8329382" y="833274"/>
+            <a:ext cx="3305636" cy="2333951"/>
+          </a:xfrm>
+          <a:prstGeom prst="rect">
+            <a:avLst/>
+          </a:prstGeom>
+        </p:spPr>
+      </p:pic>
+    </p:spTree>
+    <p:extLst>
+      <p:ext uri="{BB962C8B-B14F-4D97-AF65-F5344CB8AC3E}">
+        <p14:creationId xmlns:p14="http://schemas.microsoft.com/office/powerpoint/2010/main" val="2953375469"/>
+      </p:ext>
+    </p:extLst>
+  </p:cSld>
+  <p:clrMapOvr>
+    <a:masterClrMapping/>
+  </p:clrMapOvr>
+</p:sld>
+</file>
+
 <file path=ppt/theme/theme1.xml><?xml version="1.0" encoding="utf-8"?>
 <a:theme xmlns:a="http://schemas.openxmlformats.org/drawingml/2006/main" name="Office Theme">
   <a:themeElements>

--- a/tmt.pptx
+++ b/tmt.pptx
@@ -261,7 +261,7 @@
           <a:p>
             <a:fld id="{23911607-1ED3-4923-8ABB-7B7D7C3C6085}" type="datetimeFigureOut">
               <a:rPr lang="en-US" smtClean="0"/>
-              <a:t>7/4/2025</a:t>
+              <a:t>7/7/2025</a:t>
             </a:fld>
             <a:endParaRPr lang="en-US"/>
           </a:p>
@@ -459,7 +459,7 @@
           <a:p>
             <a:fld id="{23911607-1ED3-4923-8ABB-7B7D7C3C6085}" type="datetimeFigureOut">
               <a:rPr lang="en-US" smtClean="0"/>
-              <a:t>7/4/2025</a:t>
+              <a:t>7/7/2025</a:t>
             </a:fld>
             <a:endParaRPr lang="en-US"/>
           </a:p>
@@ -667,7 +667,7 @@
           <a:p>
             <a:fld id="{23911607-1ED3-4923-8ABB-7B7D7C3C6085}" type="datetimeFigureOut">
               <a:rPr lang="en-US" smtClean="0"/>
-              <a:t>7/4/2025</a:t>
+              <a:t>7/7/2025</a:t>
             </a:fld>
             <a:endParaRPr lang="en-US"/>
           </a:p>
@@ -865,7 +865,7 @@
           <a:p>
             <a:fld id="{23911607-1ED3-4923-8ABB-7B7D7C3C6085}" type="datetimeFigureOut">
               <a:rPr lang="en-US" smtClean="0"/>
-              <a:t>7/4/2025</a:t>
+              <a:t>7/7/2025</a:t>
             </a:fld>
             <a:endParaRPr lang="en-US"/>
           </a:p>
@@ -1140,7 +1140,7 @@
           <a:p>
             <a:fld id="{23911607-1ED3-4923-8ABB-7B7D7C3C6085}" type="datetimeFigureOut">
               <a:rPr lang="en-US" smtClean="0"/>
-              <a:t>7/4/2025</a:t>
+              <a:t>7/7/2025</a:t>
             </a:fld>
             <a:endParaRPr lang="en-US"/>
           </a:p>
@@ -1405,7 +1405,7 @@
           <a:p>
             <a:fld id="{23911607-1ED3-4923-8ABB-7B7D7C3C6085}" type="datetimeFigureOut">
               <a:rPr lang="en-US" smtClean="0"/>
-              <a:t>7/4/2025</a:t>
+              <a:t>7/7/2025</a:t>
             </a:fld>
             <a:endParaRPr lang="en-US"/>
           </a:p>
@@ -1817,7 +1817,7 @@
           <a:p>
             <a:fld id="{23911607-1ED3-4923-8ABB-7B7D7C3C6085}" type="datetimeFigureOut">
               <a:rPr lang="en-US" smtClean="0"/>
-              <a:t>7/4/2025</a:t>
+              <a:t>7/7/2025</a:t>
             </a:fld>
             <a:endParaRPr lang="en-US"/>
           </a:p>
@@ -1958,7 +1958,7 @@
           <a:p>
             <a:fld id="{23911607-1ED3-4923-8ABB-7B7D7C3C6085}" type="datetimeFigureOut">
               <a:rPr lang="en-US" smtClean="0"/>
-              <a:t>7/4/2025</a:t>
+              <a:t>7/7/2025</a:t>
             </a:fld>
             <a:endParaRPr lang="en-US"/>
           </a:p>
@@ -2071,7 +2071,7 @@
           <a:p>
             <a:fld id="{23911607-1ED3-4923-8ABB-7B7D7C3C6085}" type="datetimeFigureOut">
               <a:rPr lang="en-US" smtClean="0"/>
-              <a:t>7/4/2025</a:t>
+              <a:t>7/7/2025</a:t>
             </a:fld>
             <a:endParaRPr lang="en-US"/>
           </a:p>
@@ -2382,7 +2382,7 @@
           <a:p>
             <a:fld id="{23911607-1ED3-4923-8ABB-7B7D7C3C6085}" type="datetimeFigureOut">
               <a:rPr lang="en-US" smtClean="0"/>
-              <a:t>7/4/2025</a:t>
+              <a:t>7/7/2025</a:t>
             </a:fld>
             <a:endParaRPr lang="en-US"/>
           </a:p>
@@ -2670,7 +2670,7 @@
           <a:p>
             <a:fld id="{23911607-1ED3-4923-8ABB-7B7D7C3C6085}" type="datetimeFigureOut">
               <a:rPr lang="en-US" smtClean="0"/>
-              <a:t>7/4/2025</a:t>
+              <a:t>7/7/2025</a:t>
             </a:fld>
             <a:endParaRPr lang="en-US"/>
           </a:p>
@@ -2911,7 +2911,7 @@
           <a:p>
             <a:fld id="{23911607-1ED3-4923-8ABB-7B7D7C3C6085}" type="datetimeFigureOut">
               <a:rPr lang="en-US" smtClean="0"/>
-              <a:t>7/4/2025</a:t>
+              <a:t>7/7/2025</a:t>
             </a:fld>
             <a:endParaRPr lang="en-US"/>
           </a:p>
@@ -3478,6 +3478,138 @@
           </a:prstGeom>
         </p:spPr>
       </p:pic>
+      <p:sp>
+        <p:nvSpPr>
+          <p:cNvPr id="2" name="TextBox 1">
+            <a:extLst>
+              <a:ext uri="{FF2B5EF4-FFF2-40B4-BE49-F238E27FC236}">
+                <a16:creationId xmlns:a16="http://schemas.microsoft.com/office/drawing/2014/main" id="{7CF98C9A-0114-6A6C-C9B0-358FB3ADD169}"/>
+              </a:ext>
+            </a:extLst>
+          </p:cNvPr>
+          <p:cNvSpPr txBox="1"/>
+          <p:nvPr/>
+        </p:nvSpPr>
+        <p:spPr>
+          <a:xfrm>
+            <a:off x="8611263" y="4158532"/>
+            <a:ext cx="2838615" cy="923330"/>
+          </a:xfrm>
+          <a:prstGeom prst="rect">
+            <a:avLst/>
+          </a:prstGeom>
+          <a:noFill/>
+        </p:spPr>
+        <p:txBody>
+          <a:bodyPr wrap="square" rtlCol="0">
+            <a:spAutoFit/>
+          </a:bodyPr>
+          <a:lstStyle/>
+          <a:p>
+            <a:r>
+              <a:rPr lang="de-AT" b="1" dirty="0" err="1">
+                <a:solidFill>
+                  <a:srgbClr val="FF0000"/>
+                </a:solidFill>
+              </a:rPr>
+              <a:t>Frequency</a:t>
+            </a:r>
+            <a:r>
+              <a:rPr lang="de-AT" b="1" dirty="0">
+                <a:solidFill>
+                  <a:srgbClr val="FF0000"/>
+                </a:solidFill>
+              </a:rPr>
+              <a:t>: 5198 (</a:t>
+            </a:r>
+            <a:r>
+              <a:rPr lang="de-AT" b="1" dirty="0" err="1">
+                <a:solidFill>
+                  <a:srgbClr val="FF0000"/>
+                </a:solidFill>
+              </a:rPr>
+              <a:t>about</a:t>
+            </a:r>
+            <a:r>
+              <a:rPr lang="de-AT" b="1" dirty="0">
+                <a:solidFill>
+                  <a:srgbClr val="FF0000"/>
+                </a:solidFill>
+              </a:rPr>
+              <a:t> a </a:t>
+            </a:r>
+            <a:r>
+              <a:rPr lang="de-AT" b="1" dirty="0" err="1">
+                <a:solidFill>
+                  <a:srgbClr val="FF0000"/>
+                </a:solidFill>
+              </a:rPr>
+              <a:t>third</a:t>
+            </a:r>
+            <a:r>
+              <a:rPr lang="de-AT" b="1" dirty="0">
+                <a:solidFill>
+                  <a:srgbClr val="FF0000"/>
+                </a:solidFill>
+              </a:rPr>
+              <a:t> </a:t>
+            </a:r>
+            <a:r>
+              <a:rPr lang="de-AT" b="1" dirty="0" err="1">
+                <a:solidFill>
+                  <a:srgbClr val="FF0000"/>
+                </a:solidFill>
+              </a:rPr>
+              <a:t>of</a:t>
+            </a:r>
+            <a:r>
+              <a:rPr lang="de-AT" b="1" dirty="0">
+                <a:solidFill>
+                  <a:srgbClr val="FF0000"/>
+                </a:solidFill>
+              </a:rPr>
+              <a:t> </a:t>
+            </a:r>
+            <a:r>
+              <a:rPr lang="de-AT" b="1" dirty="0" err="1">
+                <a:solidFill>
+                  <a:srgbClr val="FF0000"/>
+                </a:solidFill>
+              </a:rPr>
+              <a:t>the</a:t>
+            </a:r>
+            <a:r>
+              <a:rPr lang="de-AT" b="1" dirty="0">
+                <a:solidFill>
+                  <a:srgbClr val="FF0000"/>
+                </a:solidFill>
+              </a:rPr>
+              <a:t> </a:t>
+            </a:r>
+            <a:r>
+              <a:rPr lang="de-AT" b="1" dirty="0" err="1">
+                <a:solidFill>
+                  <a:srgbClr val="FF0000"/>
+                </a:solidFill>
+              </a:rPr>
+              <a:t>identifications</a:t>
+            </a:r>
+            <a:r>
+              <a:rPr lang="de-AT" b="1" dirty="0">
+                <a:solidFill>
+                  <a:srgbClr val="FF0000"/>
+                </a:solidFill>
+              </a:rPr>
+              <a:t>)</a:t>
+            </a:r>
+            <a:endParaRPr lang="en-US" b="1" dirty="0">
+              <a:solidFill>
+                <a:srgbClr val="FF0000"/>
+              </a:solidFill>
+            </a:endParaRPr>
+          </a:p>
+        </p:txBody>
+      </p:sp>
     </p:spTree>
     <p:extLst>
       <p:ext uri="{BB962C8B-B14F-4D97-AF65-F5344CB8AC3E}">
